--- a/DP-800/DP-800-Jour 1 - Session 2.pptx
+++ b/DP-800/DP-800-Jour 1 - Session 2.pptx
@@ -122,7 +122,7 @@
 <file path=ppt/revisionInfo.xml><?xml version="1.0" encoding="utf-8"?>
 <p1510:revInfo xmlns:a="http://schemas.openxmlformats.org/drawingml/2006/main" xmlns:r="http://schemas.openxmlformats.org/officeDocument/2006/relationships" xmlns:p1510="http://schemas.microsoft.com/office/powerpoint/2015/10/main">
   <p1510:revLst>
-    <p1510:client id="{06B5F4AD-00C3-45A0-88B8-D156E238EAED}" v="2" dt="2026-07-28T13:35:18.874"/>
+    <p1510:client id="{06B5F4AD-00C3-45A0-88B8-D156E238EAED}" v="2" dt="2026-07-29T15:17:45.278"/>
   </p1510:revLst>
 </p1510:revInfo>
 </file>
@@ -131,17 +131,25 @@
 <pc:chgInfo xmlns:a="http://schemas.openxmlformats.org/drawingml/2006/main" xmlns:r="http://schemas.openxmlformats.org/officeDocument/2006/relationships" xmlns:ac="http://schemas.microsoft.com/office/drawing/2013/main/command" xmlns:pc="http://schemas.microsoft.com/office/powerpoint/2013/main/command">
   <pc:docChgLst>
     <pc:chgData name="Rodrigue YENGO" userId="9019d928-c12d-48de-bdb2-52a833805ac2" providerId="ADAL" clId="{20734E0D-FF75-44B1-9DFF-D19DBB4D069A}"/>
-    <pc:docChg chg="custSel modSld modMainMaster">
-      <pc:chgData name="Rodrigue YENGO" userId="9019d928-c12d-48de-bdb2-52a833805ac2" providerId="ADAL" clId="{20734E0D-FF75-44B1-9DFF-D19DBB4D069A}" dt="2026-07-28T14:00:46.479" v="40" actId="478"/>
+    <pc:docChg chg="undo custSel modSld modMainMaster">
+      <pc:chgData name="Rodrigue YENGO" userId="9019d928-c12d-48de-bdb2-52a833805ac2" providerId="ADAL" clId="{20734E0D-FF75-44B1-9DFF-D19DBB4D069A}" dt="2026-07-29T17:02:25.279" v="109" actId="478"/>
       <pc:docMkLst>
         <pc:docMk/>
       </pc:docMkLst>
-      <pc:sldChg chg="delSp modSp mod">
-        <pc:chgData name="Rodrigue YENGO" userId="9019d928-c12d-48de-bdb2-52a833805ac2" providerId="ADAL" clId="{20734E0D-FF75-44B1-9DFF-D19DBB4D069A}" dt="2026-07-28T13:59:40.563" v="32" actId="478"/>
+      <pc:sldChg chg="addSp delSp modSp mod">
+        <pc:chgData name="Rodrigue YENGO" userId="9019d928-c12d-48de-bdb2-52a833805ac2" providerId="ADAL" clId="{20734E0D-FF75-44B1-9DFF-D19DBB4D069A}" dt="2026-07-29T15:17:55.282" v="93" actId="1037"/>
         <pc:sldMkLst>
           <pc:docMk/>
           <pc:sldMk cId="0" sldId="256"/>
         </pc:sldMkLst>
+        <pc:spChg chg="del mod">
+          <ac:chgData name="Rodrigue YENGO" userId="9019d928-c12d-48de-bdb2-52a833805ac2" providerId="ADAL" clId="{20734E0D-FF75-44B1-9DFF-D19DBB4D069A}" dt="2026-07-29T15:01:43.451" v="59" actId="478"/>
+          <ac:spMkLst>
+            <pc:docMk/>
+            <pc:sldMk cId="0" sldId="256"/>
+            <ac:spMk id="2" creationId="{00000000-0000-0000-0000-000000000000}"/>
+          </ac:spMkLst>
+        </pc:spChg>
         <pc:spChg chg="del mod">
           <ac:chgData name="Rodrigue YENGO" userId="9019d928-c12d-48de-bdb2-52a833805ac2" providerId="ADAL" clId="{20734E0D-FF75-44B1-9DFF-D19DBB4D069A}" dt="2026-07-28T13:59:40.563" v="32" actId="478"/>
           <ac:spMkLst>
@@ -166,37 +174,101 @@
             <ac:spMk id="5" creationId="{00000000-0000-0000-0000-000000000000}"/>
           </ac:spMkLst>
         </pc:spChg>
-        <pc:spChg chg="mod">
-          <ac:chgData name="Rodrigue YENGO" userId="9019d928-c12d-48de-bdb2-52a833805ac2" providerId="ADAL" clId="{20734E0D-FF75-44B1-9DFF-D19DBB4D069A}" dt="2026-07-28T13:35:12.673" v="3" actId="27636"/>
+        <pc:spChg chg="del mod">
+          <ac:chgData name="Rodrigue YENGO" userId="9019d928-c12d-48de-bdb2-52a833805ac2" providerId="ADAL" clId="{20734E0D-FF75-44B1-9DFF-D19DBB4D069A}" dt="2026-07-29T14:30:35.022" v="44" actId="478"/>
           <ac:spMkLst>
             <pc:docMk/>
             <pc:sldMk cId="0" sldId="256"/>
             <ac:spMk id="6" creationId="{00000000-0000-0000-0000-000000000000}"/>
           </ac:spMkLst>
         </pc:spChg>
-        <pc:spChg chg="mod">
-          <ac:chgData name="Rodrigue YENGO" userId="9019d928-c12d-48de-bdb2-52a833805ac2" providerId="ADAL" clId="{20734E0D-FF75-44B1-9DFF-D19DBB4D069A}" dt="2026-07-28T13:35:12.677" v="4" actId="27636"/>
+        <pc:spChg chg="add del">
+          <ac:chgData name="Rodrigue YENGO" userId="9019d928-c12d-48de-bdb2-52a833805ac2" providerId="ADAL" clId="{20734E0D-FF75-44B1-9DFF-D19DBB4D069A}" dt="2026-07-29T15:03:03.212" v="67" actId="478"/>
+          <ac:spMkLst>
+            <pc:docMk/>
+            <pc:sldMk cId="0" sldId="256"/>
+            <ac:spMk id="6" creationId="{08D32D77-0464-7D48-DA99-2E9F6818294D}"/>
+          </ac:spMkLst>
+        </pc:spChg>
+        <pc:spChg chg="del mod">
+          <ac:chgData name="Rodrigue YENGO" userId="9019d928-c12d-48de-bdb2-52a833805ac2" providerId="ADAL" clId="{20734E0D-FF75-44B1-9DFF-D19DBB4D069A}" dt="2026-07-29T14:30:35.022" v="44" actId="478"/>
           <ac:spMkLst>
             <pc:docMk/>
             <pc:sldMk cId="0" sldId="256"/>
             <ac:spMk id="7" creationId="{00000000-0000-0000-0000-000000000000}"/>
           </ac:spMkLst>
         </pc:spChg>
-        <pc:spChg chg="mod">
-          <ac:chgData name="Rodrigue YENGO" userId="9019d928-c12d-48de-bdb2-52a833805ac2" providerId="ADAL" clId="{20734E0D-FF75-44B1-9DFF-D19DBB4D069A}" dt="2026-07-28T13:35:12.663" v="1" actId="27636"/>
+        <pc:spChg chg="del mod">
+          <ac:chgData name="Rodrigue YENGO" userId="9019d928-c12d-48de-bdb2-52a833805ac2" providerId="ADAL" clId="{20734E0D-FF75-44B1-9DFF-D19DBB4D069A}" dt="2026-07-29T14:30:35.022" v="44" actId="478"/>
           <ac:spMkLst>
             <pc:docMk/>
             <pc:sldMk cId="0" sldId="256"/>
             <ac:spMk id="8" creationId="{00000000-0000-0000-0000-000000000000}"/>
           </ac:spMkLst>
         </pc:spChg>
+        <pc:spChg chg="mod">
+          <ac:chgData name="Rodrigue YENGO" userId="9019d928-c12d-48de-bdb2-52a833805ac2" providerId="ADAL" clId="{20734E0D-FF75-44B1-9DFF-D19DBB4D069A}" dt="2026-07-29T15:17:45.277" v="68"/>
+          <ac:spMkLst>
+            <pc:docMk/>
+            <pc:sldMk cId="0" sldId="256"/>
+            <ac:spMk id="11" creationId="{0F5690E9-226E-5906-AE8D-3D4F6435CE90}"/>
+          </ac:spMkLst>
+        </pc:spChg>
+        <pc:spChg chg="mod">
+          <ac:chgData name="Rodrigue YENGO" userId="9019d928-c12d-48de-bdb2-52a833805ac2" providerId="ADAL" clId="{20734E0D-FF75-44B1-9DFF-D19DBB4D069A}" dt="2026-07-29T15:17:45.277" v="68"/>
+          <ac:spMkLst>
+            <pc:docMk/>
+            <pc:sldMk cId="0" sldId="256"/>
+            <ac:spMk id="12" creationId="{1F963250-E390-8203-F60C-AA8D21E2D5BD}"/>
+          </ac:spMkLst>
+        </pc:spChg>
+        <pc:grpChg chg="add mod">
+          <ac:chgData name="Rodrigue YENGO" userId="9019d928-c12d-48de-bdb2-52a833805ac2" providerId="ADAL" clId="{20734E0D-FF75-44B1-9DFF-D19DBB4D069A}" dt="2026-07-29T15:17:55.282" v="93" actId="1037"/>
+          <ac:grpSpMkLst>
+            <pc:docMk/>
+            <pc:sldMk cId="0" sldId="256"/>
+            <ac:grpSpMk id="7" creationId="{D7047FF3-9D79-D927-0186-F8BE51279F50}"/>
+          </ac:grpSpMkLst>
+        </pc:grpChg>
+        <pc:picChg chg="mod">
+          <ac:chgData name="Rodrigue YENGO" userId="9019d928-c12d-48de-bdb2-52a833805ac2" providerId="ADAL" clId="{20734E0D-FF75-44B1-9DFF-D19DBB4D069A}" dt="2026-07-29T15:17:45.277" v="68"/>
+          <ac:picMkLst>
+            <pc:docMk/>
+            <pc:sldMk cId="0" sldId="256"/>
+            <ac:picMk id="8" creationId="{AB0202BA-3D2E-364E-FC64-8FFFC7D2763C}"/>
+          </ac:picMkLst>
+        </pc:picChg>
+        <pc:picChg chg="mod">
+          <ac:chgData name="Rodrigue YENGO" userId="9019d928-c12d-48de-bdb2-52a833805ac2" providerId="ADAL" clId="{20734E0D-FF75-44B1-9DFF-D19DBB4D069A}" dt="2026-07-29T15:17:45.277" v="68"/>
+          <ac:picMkLst>
+            <pc:docMk/>
+            <pc:sldMk cId="0" sldId="256"/>
+            <ac:picMk id="9" creationId="{DD9687BA-EC00-7E8A-8C40-49C0292B7CB5}"/>
+          </ac:picMkLst>
+        </pc:picChg>
+        <pc:picChg chg="mod">
+          <ac:chgData name="Rodrigue YENGO" userId="9019d928-c12d-48de-bdb2-52a833805ac2" providerId="ADAL" clId="{20734E0D-FF75-44B1-9DFF-D19DBB4D069A}" dt="2026-07-29T15:17:45.277" v="68"/>
+          <ac:picMkLst>
+            <pc:docMk/>
+            <pc:sldMk cId="0" sldId="256"/>
+            <ac:picMk id="10" creationId="{EC1C49B8-53E7-382C-64B2-E2965D12A33D}"/>
+          </ac:picMkLst>
+        </pc:picChg>
       </pc:sldChg>
       <pc:sldChg chg="delSp modSp mod">
-        <pc:chgData name="Rodrigue YENGO" userId="9019d928-c12d-48de-bdb2-52a833805ac2" providerId="ADAL" clId="{20734E0D-FF75-44B1-9DFF-D19DBB4D069A}" dt="2026-07-28T14:00:00.165" v="34" actId="478"/>
+        <pc:chgData name="Rodrigue YENGO" userId="9019d928-c12d-48de-bdb2-52a833805ac2" providerId="ADAL" clId="{20734E0D-FF75-44B1-9DFF-D19DBB4D069A}" dt="2026-07-29T15:02:12.967" v="61" actId="478"/>
         <pc:sldMkLst>
           <pc:docMk/>
           <pc:sldMk cId="0" sldId="257"/>
         </pc:sldMkLst>
+        <pc:spChg chg="del">
+          <ac:chgData name="Rodrigue YENGO" userId="9019d928-c12d-48de-bdb2-52a833805ac2" providerId="ADAL" clId="{20734E0D-FF75-44B1-9DFF-D19DBB4D069A}" dt="2026-07-29T14:31:03.975" v="46" actId="478"/>
+          <ac:spMkLst>
+            <pc:docMk/>
+            <pc:sldMk cId="0" sldId="257"/>
+            <ac:spMk id="2" creationId="{00000000-0000-0000-0000-000000000000}"/>
+          </ac:spMkLst>
+        </pc:spChg>
         <pc:spChg chg="del mod">
           <ac:chgData name="Rodrigue YENGO" userId="9019d928-c12d-48de-bdb2-52a833805ac2" providerId="ADAL" clId="{20734E0D-FF75-44B1-9DFF-D19DBB4D069A}" dt="2026-07-28T14:00:00.165" v="34" actId="478"/>
           <ac:spMkLst>
@@ -245,13 +317,29 @@
             <ac:spMk id="11" creationId="{00000000-0000-0000-0000-000000000000}"/>
           </ac:spMkLst>
         </pc:spChg>
+        <pc:picChg chg="del">
+          <ac:chgData name="Rodrigue YENGO" userId="9019d928-c12d-48de-bdb2-52a833805ac2" providerId="ADAL" clId="{20734E0D-FF75-44B1-9DFF-D19DBB4D069A}" dt="2026-07-29T15:02:12.967" v="61" actId="478"/>
+          <ac:picMkLst>
+            <pc:docMk/>
+            <pc:sldMk cId="0" sldId="257"/>
+            <ac:picMk id="13" creationId="{00000000-0000-0000-0000-000000000000}"/>
+          </ac:picMkLst>
+        </pc:picChg>
       </pc:sldChg>
       <pc:sldChg chg="delSp modSp mod">
-        <pc:chgData name="Rodrigue YENGO" userId="9019d928-c12d-48de-bdb2-52a833805ac2" providerId="ADAL" clId="{20734E0D-FF75-44B1-9DFF-D19DBB4D069A}" dt="2026-07-28T14:00:07.458" v="35" actId="478"/>
+        <pc:chgData name="Rodrigue YENGO" userId="9019d928-c12d-48de-bdb2-52a833805ac2" providerId="ADAL" clId="{20734E0D-FF75-44B1-9DFF-D19DBB4D069A}" dt="2026-07-29T15:02:17.255" v="62" actId="478"/>
         <pc:sldMkLst>
           <pc:docMk/>
           <pc:sldMk cId="0" sldId="258"/>
         </pc:sldMkLst>
+        <pc:spChg chg="del">
+          <ac:chgData name="Rodrigue YENGO" userId="9019d928-c12d-48de-bdb2-52a833805ac2" providerId="ADAL" clId="{20734E0D-FF75-44B1-9DFF-D19DBB4D069A}" dt="2026-07-29T14:32:18.743" v="53" actId="478"/>
+          <ac:spMkLst>
+            <pc:docMk/>
+            <pc:sldMk cId="0" sldId="258"/>
+            <ac:spMk id="2" creationId="{00000000-0000-0000-0000-000000000000}"/>
+          </ac:spMkLst>
+        </pc:spChg>
         <pc:spChg chg="del mod">
           <ac:chgData name="Rodrigue YENGO" userId="9019d928-c12d-48de-bdb2-52a833805ac2" providerId="ADAL" clId="{20734E0D-FF75-44B1-9DFF-D19DBB4D069A}" dt="2026-07-28T14:00:07.458" v="35" actId="478"/>
           <ac:spMkLst>
@@ -292,13 +380,29 @@
             <ac:spMk id="9" creationId="{00000000-0000-0000-0000-000000000000}"/>
           </ac:spMkLst>
         </pc:spChg>
+        <pc:picChg chg="del">
+          <ac:chgData name="Rodrigue YENGO" userId="9019d928-c12d-48de-bdb2-52a833805ac2" providerId="ADAL" clId="{20734E0D-FF75-44B1-9DFF-D19DBB4D069A}" dt="2026-07-29T15:02:17.255" v="62" actId="478"/>
+          <ac:picMkLst>
+            <pc:docMk/>
+            <pc:sldMk cId="0" sldId="258"/>
+            <ac:picMk id="11" creationId="{00000000-0000-0000-0000-000000000000}"/>
+          </ac:picMkLst>
+        </pc:picChg>
       </pc:sldChg>
       <pc:sldChg chg="delSp modSp mod">
-        <pc:chgData name="Rodrigue YENGO" userId="9019d928-c12d-48de-bdb2-52a833805ac2" providerId="ADAL" clId="{20734E0D-FF75-44B1-9DFF-D19DBB4D069A}" dt="2026-07-28T14:00:14.923" v="37" actId="478"/>
+        <pc:chgData name="Rodrigue YENGO" userId="9019d928-c12d-48de-bdb2-52a833805ac2" providerId="ADAL" clId="{20734E0D-FF75-44B1-9DFF-D19DBB4D069A}" dt="2026-07-29T15:02:21.269" v="63" actId="478"/>
         <pc:sldMkLst>
           <pc:docMk/>
           <pc:sldMk cId="0" sldId="259"/>
         </pc:sldMkLst>
+        <pc:spChg chg="del">
+          <ac:chgData name="Rodrigue YENGO" userId="9019d928-c12d-48de-bdb2-52a833805ac2" providerId="ADAL" clId="{20734E0D-FF75-44B1-9DFF-D19DBB4D069A}" dt="2026-07-29T14:32:22.080" v="54" actId="478"/>
+          <ac:spMkLst>
+            <pc:docMk/>
+            <pc:sldMk cId="0" sldId="259"/>
+            <ac:spMk id="2" creationId="{00000000-0000-0000-0000-000000000000}"/>
+          </ac:spMkLst>
+        </pc:spChg>
         <pc:spChg chg="del mod">
           <ac:chgData name="Rodrigue YENGO" userId="9019d928-c12d-48de-bdb2-52a833805ac2" providerId="ADAL" clId="{20734E0D-FF75-44B1-9DFF-D19DBB4D069A}" dt="2026-07-28T14:00:14.923" v="37" actId="478"/>
           <ac:spMkLst>
@@ -323,13 +427,29 @@
             <ac:spMk id="6" creationId="{00000000-0000-0000-0000-000000000000}"/>
           </ac:spMkLst>
         </pc:spChg>
+        <pc:picChg chg="del">
+          <ac:chgData name="Rodrigue YENGO" userId="9019d928-c12d-48de-bdb2-52a833805ac2" providerId="ADAL" clId="{20734E0D-FF75-44B1-9DFF-D19DBB4D069A}" dt="2026-07-29T15:02:21.269" v="63" actId="478"/>
+          <ac:picMkLst>
+            <pc:docMk/>
+            <pc:sldMk cId="0" sldId="259"/>
+            <ac:picMk id="7" creationId="{00000000-0000-0000-0000-000000000000}"/>
+          </ac:picMkLst>
+        </pc:picChg>
       </pc:sldChg>
       <pc:sldChg chg="delSp modSp mod">
-        <pc:chgData name="Rodrigue YENGO" userId="9019d928-c12d-48de-bdb2-52a833805ac2" providerId="ADAL" clId="{20734E0D-FF75-44B1-9DFF-D19DBB4D069A}" dt="2026-07-28T14:00:20.050" v="38" actId="478"/>
+        <pc:chgData name="Rodrigue YENGO" userId="9019d928-c12d-48de-bdb2-52a833805ac2" providerId="ADAL" clId="{20734E0D-FF75-44B1-9DFF-D19DBB4D069A}" dt="2026-07-29T14:32:25.357" v="55" actId="478"/>
         <pc:sldMkLst>
           <pc:docMk/>
           <pc:sldMk cId="0" sldId="260"/>
         </pc:sldMkLst>
+        <pc:spChg chg="del">
+          <ac:chgData name="Rodrigue YENGO" userId="9019d928-c12d-48de-bdb2-52a833805ac2" providerId="ADAL" clId="{20734E0D-FF75-44B1-9DFF-D19DBB4D069A}" dt="2026-07-29T14:32:25.357" v="55" actId="478"/>
+          <ac:spMkLst>
+            <pc:docMk/>
+            <pc:sldMk cId="0" sldId="260"/>
+            <ac:spMk id="2" creationId="{00000000-0000-0000-0000-000000000000}"/>
+          </ac:spMkLst>
+        </pc:spChg>
         <pc:spChg chg="del mod">
           <ac:chgData name="Rodrigue YENGO" userId="9019d928-c12d-48de-bdb2-52a833805ac2" providerId="ADAL" clId="{20734E0D-FF75-44B1-9DFF-D19DBB4D069A}" dt="2026-07-28T14:00:20.050" v="38" actId="478"/>
           <ac:spMkLst>
@@ -348,11 +468,19 @@
         </pc:spChg>
       </pc:sldChg>
       <pc:sldChg chg="delSp modSp mod">
-        <pc:chgData name="Rodrigue YENGO" userId="9019d928-c12d-48de-bdb2-52a833805ac2" providerId="ADAL" clId="{20734E0D-FF75-44B1-9DFF-D19DBB4D069A}" dt="2026-07-28T14:00:46.479" v="40" actId="478"/>
+        <pc:chgData name="Rodrigue YENGO" userId="9019d928-c12d-48de-bdb2-52a833805ac2" providerId="ADAL" clId="{20734E0D-FF75-44B1-9DFF-D19DBB4D069A}" dt="2026-07-29T15:02:27.651" v="64" actId="478"/>
         <pc:sldMkLst>
           <pc:docMk/>
           <pc:sldMk cId="0" sldId="261"/>
         </pc:sldMkLst>
+        <pc:spChg chg="del">
+          <ac:chgData name="Rodrigue YENGO" userId="9019d928-c12d-48de-bdb2-52a833805ac2" providerId="ADAL" clId="{20734E0D-FF75-44B1-9DFF-D19DBB4D069A}" dt="2026-07-29T14:32:28.283" v="56" actId="478"/>
+          <ac:spMkLst>
+            <pc:docMk/>
+            <pc:sldMk cId="0" sldId="261"/>
+            <ac:spMk id="2" creationId="{00000000-0000-0000-0000-000000000000}"/>
+          </ac:spMkLst>
+        </pc:spChg>
         <pc:spChg chg="del mod">
           <ac:chgData name="Rodrigue YENGO" userId="9019d928-c12d-48de-bdb2-52a833805ac2" providerId="ADAL" clId="{20734E0D-FF75-44B1-9DFF-D19DBB4D069A}" dt="2026-07-28T14:00:46.479" v="40" actId="478"/>
           <ac:spMkLst>
@@ -377,13 +505,29 @@
             <ac:spMk id="5" creationId="{00000000-0000-0000-0000-000000000000}"/>
           </ac:spMkLst>
         </pc:spChg>
+        <pc:picChg chg="del">
+          <ac:chgData name="Rodrigue YENGO" userId="9019d928-c12d-48de-bdb2-52a833805ac2" providerId="ADAL" clId="{20734E0D-FF75-44B1-9DFF-D19DBB4D069A}" dt="2026-07-29T15:02:27.651" v="64" actId="478"/>
+          <ac:picMkLst>
+            <pc:docMk/>
+            <pc:sldMk cId="0" sldId="261"/>
+            <ac:picMk id="14" creationId="{00000000-0000-0000-0000-000000000000}"/>
+          </ac:picMkLst>
+        </pc:picChg>
       </pc:sldChg>
       <pc:sldChg chg="delSp modSp mod">
-        <pc:chgData name="Rodrigue YENGO" userId="9019d928-c12d-48de-bdb2-52a833805ac2" providerId="ADAL" clId="{20734E0D-FF75-44B1-9DFF-D19DBB4D069A}" dt="2026-07-28T14:00:40.998" v="39" actId="478"/>
+        <pc:chgData name="Rodrigue YENGO" userId="9019d928-c12d-48de-bdb2-52a833805ac2" providerId="ADAL" clId="{20734E0D-FF75-44B1-9DFF-D19DBB4D069A}" dt="2026-07-29T15:02:33.244" v="65" actId="478"/>
         <pc:sldMkLst>
           <pc:docMk/>
           <pc:sldMk cId="0" sldId="262"/>
         </pc:sldMkLst>
+        <pc:spChg chg="del">
+          <ac:chgData name="Rodrigue YENGO" userId="9019d928-c12d-48de-bdb2-52a833805ac2" providerId="ADAL" clId="{20734E0D-FF75-44B1-9DFF-D19DBB4D069A}" dt="2026-07-29T14:32:31.214" v="57" actId="478"/>
+          <ac:spMkLst>
+            <pc:docMk/>
+            <pc:sldMk cId="0" sldId="262"/>
+            <ac:spMk id="2" creationId="{00000000-0000-0000-0000-000000000000}"/>
+          </ac:spMkLst>
+        </pc:spChg>
         <pc:spChg chg="del mod">
           <ac:chgData name="Rodrigue YENGO" userId="9019d928-c12d-48de-bdb2-52a833805ac2" providerId="ADAL" clId="{20734E0D-FF75-44B1-9DFF-D19DBB4D069A}" dt="2026-07-28T14:00:40.998" v="39" actId="478"/>
           <ac:spMkLst>
@@ -400,13 +544,29 @@
             <ac:spMk id="4" creationId="{00000000-0000-0000-0000-000000000000}"/>
           </ac:spMkLst>
         </pc:spChg>
+        <pc:picChg chg="del">
+          <ac:chgData name="Rodrigue YENGO" userId="9019d928-c12d-48de-bdb2-52a833805ac2" providerId="ADAL" clId="{20734E0D-FF75-44B1-9DFF-D19DBB4D069A}" dt="2026-07-29T15:02:33.244" v="65" actId="478"/>
+          <ac:picMkLst>
+            <pc:docMk/>
+            <pc:sldMk cId="0" sldId="262"/>
+            <ac:picMk id="6" creationId="{00000000-0000-0000-0000-000000000000}"/>
+          </ac:picMkLst>
+        </pc:picChg>
       </pc:sldChg>
-      <pc:sldChg chg="modSp mod">
-        <pc:chgData name="Rodrigue YENGO" userId="9019d928-c12d-48de-bdb2-52a833805ac2" providerId="ADAL" clId="{20734E0D-FF75-44B1-9DFF-D19DBB4D069A}" dt="2026-07-28T13:35:12.823" v="29" actId="27636"/>
+      <pc:sldChg chg="delSp modSp mod">
+        <pc:chgData name="Rodrigue YENGO" userId="9019d928-c12d-48de-bdb2-52a833805ac2" providerId="ADAL" clId="{20734E0D-FF75-44B1-9DFF-D19DBB4D069A}" dt="2026-07-29T14:32:36.868" v="58" actId="478"/>
         <pc:sldMkLst>
           <pc:docMk/>
           <pc:sldMk cId="0" sldId="263"/>
         </pc:sldMkLst>
+        <pc:spChg chg="del">
+          <ac:chgData name="Rodrigue YENGO" userId="9019d928-c12d-48de-bdb2-52a833805ac2" providerId="ADAL" clId="{20734E0D-FF75-44B1-9DFF-D19DBB4D069A}" dt="2026-07-29T14:32:36.868" v="58" actId="478"/>
+          <ac:spMkLst>
+            <pc:docMk/>
+            <pc:sldMk cId="0" sldId="263"/>
+            <ac:spMk id="2" creationId="{00000000-0000-0000-0000-000000000000}"/>
+          </ac:spMkLst>
+        </pc:spChg>
         <pc:spChg chg="mod">
           <ac:chgData name="Rodrigue YENGO" userId="9019d928-c12d-48de-bdb2-52a833805ac2" providerId="ADAL" clId="{20734E0D-FF75-44B1-9DFF-D19DBB4D069A}" dt="2026-07-28T13:35:12.821" v="28" actId="27636"/>
           <ac:spMkLst>
@@ -424,14 +584,30 @@
           </ac:spMkLst>
         </pc:spChg>
       </pc:sldChg>
-      <pc:sldMasterChg chg="modSldLayout">
-        <pc:chgData name="Rodrigue YENGO" userId="9019d928-c12d-48de-bdb2-52a833805ac2" providerId="ADAL" clId="{20734E0D-FF75-44B1-9DFF-D19DBB4D069A}" dt="2026-07-28T13:59:47.356" v="33" actId="22"/>
+      <pc:sldMasterChg chg="addSp delSp mod modSldLayout">
+        <pc:chgData name="Rodrigue YENGO" userId="9019d928-c12d-48de-bdb2-52a833805ac2" providerId="ADAL" clId="{20734E0D-FF75-44B1-9DFF-D19DBB4D069A}" dt="2026-07-29T17:02:25.279" v="109" actId="478"/>
         <pc:sldMasterMkLst>
           <pc:docMk/>
           <pc:sldMasterMk cId="0" sldId="2147483648"/>
         </pc:sldMasterMkLst>
-        <pc:sldLayoutChg chg="addSp mod">
-          <pc:chgData name="Rodrigue YENGO" userId="9019d928-c12d-48de-bdb2-52a833805ac2" providerId="ADAL" clId="{20734E0D-FF75-44B1-9DFF-D19DBB4D069A}" dt="2026-07-28T13:59:47.356" v="33" actId="22"/>
+        <pc:picChg chg="del">
+          <ac:chgData name="Rodrigue YENGO" userId="9019d928-c12d-48de-bdb2-52a833805ac2" providerId="ADAL" clId="{20734E0D-FF75-44B1-9DFF-D19DBB4D069A}" dt="2026-07-29T15:53:32.240" v="94" actId="478"/>
+          <ac:picMkLst>
+            <pc:docMk/>
+            <pc:sldMasterMk cId="0" sldId="2147483648"/>
+            <ac:picMk id="3" creationId="{AF65C76B-2285-B8AB-11CC-CC9B9424C473}"/>
+          </ac:picMkLst>
+        </pc:picChg>
+        <pc:picChg chg="add">
+          <ac:chgData name="Rodrigue YENGO" userId="9019d928-c12d-48de-bdb2-52a833805ac2" providerId="ADAL" clId="{20734E0D-FF75-44B1-9DFF-D19DBB4D069A}" dt="2026-07-29T15:53:32.942" v="95" actId="22"/>
+          <ac:picMkLst>
+            <pc:docMk/>
+            <pc:sldMasterMk cId="0" sldId="2147483648"/>
+            <ac:picMk id="4" creationId="{B6ACFF50-4E9E-69FA-ABC0-45F3B06CFA97}"/>
+          </ac:picMkLst>
+        </pc:picChg>
+        <pc:sldLayoutChg chg="addSp delSp modSp mod setBg">
+          <pc:chgData name="Rodrigue YENGO" userId="9019d928-c12d-48de-bdb2-52a833805ac2" providerId="ADAL" clId="{20734E0D-FF75-44B1-9DFF-D19DBB4D069A}" dt="2026-07-29T17:02:25.279" v="109" actId="478"/>
           <pc:sldLayoutMkLst>
             <pc:docMk/>
             <pc:sldMasterMk cId="0" sldId="2147483648"/>
@@ -446,6 +622,87 @@
               <ac:spMk id="3" creationId="{AEE5DB1C-2AAF-E909-4934-0AFEC3EC13EB}"/>
             </ac:spMkLst>
           </pc:spChg>
+          <pc:spChg chg="add">
+            <ac:chgData name="Rodrigue YENGO" userId="9019d928-c12d-48de-bdb2-52a833805ac2" providerId="ADAL" clId="{20734E0D-FF75-44B1-9DFF-D19DBB4D069A}" dt="2026-07-29T14:30:47.992" v="45" actId="22"/>
+            <ac:spMkLst>
+              <pc:docMk/>
+              <pc:sldMasterMk cId="0" sldId="2147483648"/>
+              <pc:sldLayoutMk cId="0" sldId="2147483649"/>
+              <ac:spMk id="4" creationId="{0E22A12F-9549-4ACA-8441-EF760928014A}"/>
+            </ac:spMkLst>
+          </pc:spChg>
+          <pc:spChg chg="add">
+            <ac:chgData name="Rodrigue YENGO" userId="9019d928-c12d-48de-bdb2-52a833805ac2" providerId="ADAL" clId="{20734E0D-FF75-44B1-9DFF-D19DBB4D069A}" dt="2026-07-29T15:01:49.516" v="60" actId="22"/>
+            <ac:spMkLst>
+              <pc:docMk/>
+              <pc:sldMasterMk cId="0" sldId="2147483648"/>
+              <pc:sldLayoutMk cId="0" sldId="2147483649"/>
+              <ac:spMk id="5" creationId="{46138FA5-9928-03D2-5B21-48B7D6CD2B06}"/>
+            </ac:spMkLst>
+          </pc:spChg>
+          <pc:spChg chg="add">
+            <ac:chgData name="Rodrigue YENGO" userId="9019d928-c12d-48de-bdb2-52a833805ac2" providerId="ADAL" clId="{20734E0D-FF75-44B1-9DFF-D19DBB4D069A}" dt="2026-07-29T14:30:47.992" v="45" actId="22"/>
+            <ac:spMkLst>
+              <pc:docMk/>
+              <pc:sldMasterMk cId="0" sldId="2147483648"/>
+              <pc:sldLayoutMk cId="0" sldId="2147483649"/>
+              <ac:spMk id="6" creationId="{B26DF3EA-52CD-1AA4-79AB-E33AD37C4E7F}"/>
+            </ac:spMkLst>
+          </pc:spChg>
+          <pc:spChg chg="add del">
+            <ac:chgData name="Rodrigue YENGO" userId="9019d928-c12d-48de-bdb2-52a833805ac2" providerId="ADAL" clId="{20734E0D-FF75-44B1-9DFF-D19DBB4D069A}" dt="2026-07-29T17:01:25.024" v="97" actId="22"/>
+            <ac:spMkLst>
+              <pc:docMk/>
+              <pc:sldMasterMk cId="0" sldId="2147483648"/>
+              <pc:sldLayoutMk cId="0" sldId="2147483649"/>
+              <ac:spMk id="7" creationId="{219E2700-022D-E372-DE02-2CDBA85685CE}"/>
+            </ac:spMkLst>
+          </pc:spChg>
+          <pc:spChg chg="add">
+            <ac:chgData name="Rodrigue YENGO" userId="9019d928-c12d-48de-bdb2-52a833805ac2" providerId="ADAL" clId="{20734E0D-FF75-44B1-9DFF-D19DBB4D069A}" dt="2026-07-29T14:30:47.992" v="45" actId="22"/>
+            <ac:spMkLst>
+              <pc:docMk/>
+              <pc:sldMasterMk cId="0" sldId="2147483648"/>
+              <pc:sldLayoutMk cId="0" sldId="2147483649"/>
+              <ac:spMk id="8" creationId="{A820CC65-CBC9-0C24-D707-4FD271FA6D3D}"/>
+            </ac:spMkLst>
+          </pc:spChg>
+          <pc:picChg chg="add del">
+            <ac:chgData name="Rodrigue YENGO" userId="9019d928-c12d-48de-bdb2-52a833805ac2" providerId="ADAL" clId="{20734E0D-FF75-44B1-9DFF-D19DBB4D069A}" dt="2026-07-29T14:31:46.432" v="50" actId="21"/>
+            <ac:picMkLst>
+              <pc:docMk/>
+              <pc:sldMasterMk cId="0" sldId="2147483648"/>
+              <pc:sldLayoutMk cId="0" sldId="2147483649"/>
+              <ac:picMk id="10" creationId="{647C142F-17F9-F2EE-60A5-84EAC591208B}"/>
+            </ac:picMkLst>
+          </pc:picChg>
+          <pc:picChg chg="add mod">
+            <ac:chgData name="Rodrigue YENGO" userId="9019d928-c12d-48de-bdb2-52a833805ac2" providerId="ADAL" clId="{20734E0D-FF75-44B1-9DFF-D19DBB4D069A}" dt="2026-07-29T17:01:55.065" v="107" actId="1036"/>
+            <ac:picMkLst>
+              <pc:docMk/>
+              <pc:sldMasterMk cId="0" sldId="2147483648"/>
+              <pc:sldLayoutMk cId="0" sldId="2147483649"/>
+              <ac:picMk id="10" creationId="{80EBAE68-F3D7-F4D9-4A2D-2619C9272574}"/>
+            </ac:picMkLst>
+          </pc:picChg>
+          <pc:picChg chg="add">
+            <ac:chgData name="Rodrigue YENGO" userId="9019d928-c12d-48de-bdb2-52a833805ac2" providerId="ADAL" clId="{20734E0D-FF75-44B1-9DFF-D19DBB4D069A}" dt="2026-07-29T14:31:56.011" v="52" actId="22"/>
+            <ac:picMkLst>
+              <pc:docMk/>
+              <pc:sldMasterMk cId="0" sldId="2147483648"/>
+              <pc:sldLayoutMk cId="0" sldId="2147483649"/>
+              <ac:picMk id="12" creationId="{53A91EDE-FBFE-A183-43D1-80CE38C7B948}"/>
+            </ac:picMkLst>
+          </pc:picChg>
+          <pc:picChg chg="add del">
+            <ac:chgData name="Rodrigue YENGO" userId="9019d928-c12d-48de-bdb2-52a833805ac2" providerId="ADAL" clId="{20734E0D-FF75-44B1-9DFF-D19DBB4D069A}" dt="2026-07-29T17:02:25.279" v="109" actId="478"/>
+            <ac:picMkLst>
+              <pc:docMk/>
+              <pc:sldMasterMk cId="0" sldId="2147483648"/>
+              <pc:sldLayoutMk cId="0" sldId="2147483649"/>
+              <ac:picMk id="13" creationId="{1C1FB3E8-95D4-8F00-A95B-7FDE59A53E29}"/>
+            </ac:picMkLst>
+          </pc:picChg>
         </pc:sldLayoutChg>
       </pc:sldMasterChg>
       <pc:sldMasterChg chg="addSp mod">
@@ -1346,10 +1603,273 @@
           </a:p>
         </p:txBody>
       </p:sp>
+      <p:sp>
+        <p:nvSpPr>
+          <p:cNvPr id="4" name="Text 4">
+            <a:extLst>
+              <a:ext uri="{FF2B5EF4-FFF2-40B4-BE49-F238E27FC236}">
+                <a16:creationId xmlns:a16="http://schemas.microsoft.com/office/drawing/2014/main" id="{0E22A12F-9549-4ACA-8441-EF760928014A}"/>
+              </a:ext>
+            </a:extLst>
+          </p:cNvPr>
+          <p:cNvSpPr/>
+          <p:nvPr userDrawn="1"/>
+        </p:nvSpPr>
+        <p:spPr>
+          <a:xfrm>
+            <a:off x="1143000" y="9296400"/>
+            <a:ext cx="3245078" cy="190500"/>
+          </a:xfrm>
+          <a:prstGeom prst="rect">
+            <a:avLst/>
+          </a:prstGeom>
+          <a:noFill/>
+          <a:ln/>
+        </p:spPr>
+        <p:txBody>
+          <a:bodyPr wrap="square" lIns="25400" tIns="25400" rIns="25400" bIns="25400" rtlCol="0" anchor="t">
+            <a:noAutofit/>
+          </a:bodyPr>
+          <a:lstStyle/>
+          <a:p>
+            <a:pPr marL="0" indent="0" algn="l">
+              <a:lnSpc>
+                <a:spcPct val="131154"/>
+              </a:lnSpc>
+              <a:buNone/>
+            </a:pPr>
+            <a:r>
+              <a:rPr lang="en-US" sz="1400" dirty="0">
+                <a:solidFill>
+                  <a:srgbClr val="E9E9ED">
+                    <a:alpha val="55000"/>
+                  </a:srgbClr>
+                </a:solidFill>
+                <a:latin typeface="Arial" pitchFamily="34" charset="0"/>
+                <a:ea typeface="Arial" pitchFamily="34" charset="-122"/>
+                <a:cs typeface="Arial" pitchFamily="34" charset="-120"/>
+              </a:rPr>
+              <a:t>Data &amp; AI France Study Group</a:t>
+            </a:r>
+            <a:endParaRPr lang="en-US" sz="1400" dirty="0"/>
+          </a:p>
+        </p:txBody>
+      </p:sp>
+      <p:sp>
+        <p:nvSpPr>
+          <p:cNvPr id="6" name="Text 5">
+            <a:extLst>
+              <a:ext uri="{FF2B5EF4-FFF2-40B4-BE49-F238E27FC236}">
+                <a16:creationId xmlns:a16="http://schemas.microsoft.com/office/drawing/2014/main" id="{B26DF3EA-52CD-1AA4-79AB-E33AD37C4E7F}"/>
+              </a:ext>
+            </a:extLst>
+          </p:cNvPr>
+          <p:cNvSpPr/>
+          <p:nvPr userDrawn="1"/>
+        </p:nvSpPr>
+        <p:spPr>
+          <a:xfrm>
+            <a:off x="4264521" y="9296400"/>
+            <a:ext cx="136624" cy="190500"/>
+          </a:xfrm>
+          <a:prstGeom prst="rect">
+            <a:avLst/>
+          </a:prstGeom>
+          <a:noFill/>
+          <a:ln/>
+        </p:spPr>
+        <p:txBody>
+          <a:bodyPr wrap="square" lIns="25400" tIns="25400" rIns="25400" bIns="25400" rtlCol="0" anchor="t">
+            <a:noAutofit/>
+          </a:bodyPr>
+          <a:lstStyle/>
+          <a:p>
+            <a:pPr marL="0" indent="0" algn="l">
+              <a:lnSpc>
+                <a:spcPct val="131154"/>
+              </a:lnSpc>
+              <a:buNone/>
+            </a:pPr>
+            <a:r>
+              <a:rPr lang="en-US" sz="1400" dirty="0">
+                <a:solidFill>
+                  <a:srgbClr val="E9E9ED">
+                    <a:alpha val="55000"/>
+                  </a:srgbClr>
+                </a:solidFill>
+                <a:latin typeface="Arial" pitchFamily="34" charset="0"/>
+                <a:ea typeface="Arial" pitchFamily="34" charset="-122"/>
+                <a:cs typeface="Arial" pitchFamily="34" charset="-120"/>
+              </a:rPr>
+              <a:t>·</a:t>
+            </a:r>
+            <a:endParaRPr lang="en-US" sz="1400" dirty="0"/>
+          </a:p>
+        </p:txBody>
+      </p:sp>
+      <p:sp>
+        <p:nvSpPr>
+          <p:cNvPr id="8" name="Text 6">
+            <a:extLst>
+              <a:ext uri="{FF2B5EF4-FFF2-40B4-BE49-F238E27FC236}">
+                <a16:creationId xmlns:a16="http://schemas.microsoft.com/office/drawing/2014/main" id="{A820CC65-CBC9-0C24-D707-4FD271FA6D3D}"/>
+              </a:ext>
+            </a:extLst>
+          </p:cNvPr>
+          <p:cNvSpPr/>
+          <p:nvPr userDrawn="1"/>
+        </p:nvSpPr>
+        <p:spPr>
+          <a:xfrm>
+            <a:off x="4496395" y="9296400"/>
+            <a:ext cx="2313072" cy="190500"/>
+          </a:xfrm>
+          <a:prstGeom prst="rect">
+            <a:avLst/>
+          </a:prstGeom>
+          <a:noFill/>
+          <a:ln/>
+        </p:spPr>
+        <p:txBody>
+          <a:bodyPr wrap="square" lIns="25400" tIns="25400" rIns="25400" bIns="25400" rtlCol="0" anchor="t">
+            <a:noAutofit/>
+          </a:bodyPr>
+          <a:lstStyle/>
+          <a:p>
+            <a:pPr marL="0" indent="0" algn="l">
+              <a:lnSpc>
+                <a:spcPct val="131154"/>
+              </a:lnSpc>
+              <a:buNone/>
+            </a:pPr>
+            <a:r>
+              <a:rPr lang="en-US" sz="1400" dirty="0">
+                <a:solidFill>
+                  <a:srgbClr val="E9E9ED">
+                    <a:alpha val="55000"/>
+                  </a:srgbClr>
+                </a:solidFill>
+                <a:latin typeface="Arial" pitchFamily="34" charset="0"/>
+                <a:ea typeface="Arial" pitchFamily="34" charset="-122"/>
+                <a:cs typeface="Arial" pitchFamily="34" charset="-120"/>
+              </a:rPr>
+              <a:t>Data Days — DP-800</a:t>
+            </a:r>
+            <a:endParaRPr lang="en-US" sz="1400" dirty="0"/>
+          </a:p>
+        </p:txBody>
+      </p:sp>
+      <p:pic>
+        <p:nvPicPr>
+          <p:cNvPr id="12" name="Image 11">
+            <a:extLst>
+              <a:ext uri="{FF2B5EF4-FFF2-40B4-BE49-F238E27FC236}">
+                <a16:creationId xmlns:a16="http://schemas.microsoft.com/office/drawing/2014/main" id="{53A91EDE-FBFE-A183-43D1-80CE38C7B948}"/>
+              </a:ext>
+            </a:extLst>
+          </p:cNvPr>
+          <p:cNvPicPr>
+            <a:picLocks noChangeAspect="1"/>
+          </p:cNvPicPr>
+          <p:nvPr userDrawn="1"/>
+        </p:nvPicPr>
+        <p:blipFill>
+          <a:blip r:embed="rId2"/>
+          <a:stretch>
+            <a:fillRect/>
+          </a:stretch>
+        </p:blipFill>
+        <p:spPr>
+          <a:xfrm>
+            <a:off x="2708" y="0"/>
+            <a:ext cx="18282583" cy="10287000"/>
+          </a:xfrm>
+          <a:prstGeom prst="rect">
+            <a:avLst/>
+          </a:prstGeom>
+        </p:spPr>
+      </p:pic>
+      <p:sp>
+        <p:nvSpPr>
+          <p:cNvPr id="5" name="Shape 0">
+            <a:extLst>
+              <a:ext uri="{FF2B5EF4-FFF2-40B4-BE49-F238E27FC236}">
+                <a16:creationId xmlns:a16="http://schemas.microsoft.com/office/drawing/2014/main" id="{46138FA5-9928-03D2-5B21-48B7D6CD2B06}"/>
+              </a:ext>
+            </a:extLst>
+          </p:cNvPr>
+          <p:cNvSpPr/>
+          <p:nvPr userDrawn="1"/>
+        </p:nvSpPr>
+        <p:spPr>
+          <a:xfrm>
+            <a:off x="7509599" y="1629508"/>
+            <a:ext cx="18288000" cy="10287000"/>
+          </a:xfrm>
+          <a:prstGeom prst="rect">
+            <a:avLst/>
+          </a:prstGeom>
+          <a:gradFill rotWithShape="1">
+            <a:gsLst>
+              <a:gs pos="0">
+                <a:srgbClr val="2B2741">
+                  <a:alpha val="75000"/>
+                </a:srgbClr>
+              </a:gs>
+              <a:gs pos="58000">
+                <a:srgbClr val="2B2741">
+                  <a:alpha val="0"/>
+                </a:srgbClr>
+              </a:gs>
+            </a:gsLst>
+            <a:path path="circle">
+              <a:fillToRect l="80000" r="20000" b="100000"/>
+            </a:path>
+          </a:gradFill>
+          <a:ln/>
+        </p:spPr>
+        <p:txBody>
+          <a:bodyPr/>
+          <a:lstStyle/>
+          <a:p>
+            <a:endParaRPr lang="en-GB"/>
+          </a:p>
+        </p:txBody>
+      </p:sp>
+      <p:pic>
+        <p:nvPicPr>
+          <p:cNvPr id="10" name="Image 9">
+            <a:extLst>
+              <a:ext uri="{FF2B5EF4-FFF2-40B4-BE49-F238E27FC236}">
+                <a16:creationId xmlns:a16="http://schemas.microsoft.com/office/drawing/2014/main" id="{80EBAE68-F3D7-F4D9-4A2D-2619C9272574}"/>
+              </a:ext>
+            </a:extLst>
+          </p:cNvPr>
+          <p:cNvPicPr>
+            <a:picLocks noChangeAspect="1"/>
+          </p:cNvPicPr>
+          <p:nvPr userDrawn="1"/>
+        </p:nvPicPr>
+        <p:blipFill>
+          <a:blip r:embed="rId3"/>
+          <a:stretch>
+            <a:fillRect/>
+          </a:stretch>
+        </p:blipFill>
+        <p:spPr>
+          <a:xfrm>
+            <a:off x="468959" y="7407996"/>
+            <a:ext cx="5111262" cy="3407508"/>
+          </a:xfrm>
+          <a:prstGeom prst="rect">
+            <a:avLst/>
+          </a:prstGeom>
+        </p:spPr>
+      </p:pic>
     </p:spTree>
   </p:cSld>
   <p:clrMapOvr>
-    <a:masterClrMapping/>
+    <a:overrideClrMapping bg1="dk1" tx1="lt1" bg2="dk2" tx2="lt2" accent1="accent1" accent2="accent2" accent3="accent3" accent4="accent4" accent5="accent5" accent6="accent6" hlink="hlink" folHlink="folHlink"/>
   </p:clrMapOvr>
 </p:sldLayout>
 </file>
@@ -1378,10 +1898,10 @@
       </p:grpSpPr>
       <p:pic>
         <p:nvPicPr>
-          <p:cNvPr id="3" name="Image 2">
+          <p:cNvPr id="4" name="Image 3">
             <a:extLst>
               <a:ext uri="{FF2B5EF4-FFF2-40B4-BE49-F238E27FC236}">
-                <a16:creationId xmlns:a16="http://schemas.microsoft.com/office/drawing/2014/main" id="{AF65C76B-2285-B8AB-11CC-CC9B9424C473}"/>
+                <a16:creationId xmlns:a16="http://schemas.microsoft.com/office/drawing/2014/main" id="{B6ACFF50-4E9E-69FA-ABC0-45F3B06CFA97}"/>
               </a:ext>
             </a:extLst>
           </p:cNvPr>
@@ -1398,8 +1918,8 @@
         </p:blipFill>
         <p:spPr>
           <a:xfrm>
-            <a:off x="16205200" y="194732"/>
-            <a:ext cx="2222500" cy="1481667"/>
+            <a:off x="16732737" y="194733"/>
+            <a:ext cx="1694962" cy="1129975"/>
           </a:xfrm>
           <a:prstGeom prst="rect">
             <a:avLst/>
@@ -1693,47 +2213,6 @@
       </p:grpSpPr>
       <p:sp>
         <p:nvSpPr>
-          <p:cNvPr id="2" name="Shape 0"/>
-          <p:cNvSpPr/>
-          <p:nvPr/>
-        </p:nvSpPr>
-        <p:spPr>
-          <a:xfrm>
-            <a:off x="0" y="0"/>
-            <a:ext cx="18288000" cy="10287000"/>
-          </a:xfrm>
-          <a:prstGeom prst="rect">
-            <a:avLst/>
-          </a:prstGeom>
-          <a:gradFill rotWithShape="1">
-            <a:gsLst>
-              <a:gs pos="0">
-                <a:srgbClr val="2B2741">
-                  <a:alpha val="75000"/>
-                </a:srgbClr>
-              </a:gs>
-              <a:gs pos="58000">
-                <a:srgbClr val="2B2741">
-                  <a:alpha val="0"/>
-                </a:srgbClr>
-              </a:gs>
-            </a:gsLst>
-            <a:path path="circle">
-              <a:fillToRect l="80000" r="20000" b="100000"/>
-            </a:path>
-          </a:gradFill>
-          <a:ln/>
-        </p:spPr>
-        <p:txBody>
-          <a:bodyPr/>
-          <a:lstStyle/>
-          <a:p>
-            <a:endParaRPr lang="en-GB"/>
-          </a:p>
-        </p:txBody>
-      </p:sp>
-      <p:sp>
-        <p:nvSpPr>
           <p:cNvPr id="4" name="Text 2"/>
           <p:cNvSpPr/>
           <p:nvPr/>
@@ -1820,144 +2299,240 @@
           </a:p>
         </p:txBody>
       </p:sp>
-      <p:sp>
-        <p:nvSpPr>
-          <p:cNvPr id="6" name="Text 4"/>
-          <p:cNvSpPr/>
+      <p:grpSp>
+        <p:nvGrpSpPr>
+          <p:cNvPr id="7" name="Groupe 6">
+            <a:extLst>
+              <a:ext uri="{FF2B5EF4-FFF2-40B4-BE49-F238E27FC236}">
+                <a16:creationId xmlns:a16="http://schemas.microsoft.com/office/drawing/2014/main" id="{D7047FF3-9D79-D927-0186-F8BE51279F50}"/>
+              </a:ext>
+            </a:extLst>
+          </p:cNvPr>
+          <p:cNvGrpSpPr/>
           <p:nvPr/>
-        </p:nvSpPr>
-        <p:spPr>
+        </p:nvGrpSpPr>
+        <p:grpSpPr>
           <a:xfrm>
-            <a:off x="1143000" y="9296400"/>
-            <a:ext cx="3245078" cy="190500"/>
+            <a:off x="10310563" y="561196"/>
+            <a:ext cx="6990490" cy="8735204"/>
+            <a:chOff x="11002220" y="561196"/>
+            <a:chExt cx="6990490" cy="8735204"/>
           </a:xfrm>
-          <a:prstGeom prst="rect">
-            <a:avLst/>
-          </a:prstGeom>
-          <a:noFill/>
-          <a:ln/>
-        </p:spPr>
-        <p:txBody>
-          <a:bodyPr wrap="square" lIns="25400" tIns="25400" rIns="25400" bIns="25400" rtlCol="0" anchor="t">
-            <a:normAutofit fontScale="47500" lnSpcReduction="20000"/>
-          </a:bodyPr>
-          <a:lstStyle/>
-          <a:p>
-            <a:pPr marL="0" indent="0" algn="l">
-              <a:lnSpc>
-                <a:spcPct val="131154"/>
-              </a:lnSpc>
-              <a:buNone/>
-            </a:pPr>
-            <a:r>
-              <a:rPr lang="en-US" sz="1650" dirty="0">
-                <a:solidFill>
-                  <a:srgbClr val="E9E9ED">
-                    <a:alpha val="55000"/>
-                  </a:srgbClr>
-                </a:solidFill>
-                <a:latin typeface="Arial" pitchFamily="34" charset="0"/>
-                <a:ea typeface="Arial" pitchFamily="34" charset="-122"/>
-                <a:cs typeface="Arial" pitchFamily="34" charset="-120"/>
-              </a:rPr>
-              <a:t>Data &amp; AI France Study Group</a:t>
-            </a:r>
-            <a:endParaRPr lang="en-US" sz="1650" dirty="0"/>
-          </a:p>
-        </p:txBody>
-      </p:sp>
-      <p:sp>
-        <p:nvSpPr>
-          <p:cNvPr id="7" name="Text 5"/>
-          <p:cNvSpPr/>
-          <p:nvPr/>
-        </p:nvSpPr>
-        <p:spPr>
-          <a:xfrm>
-            <a:off x="4264521" y="9296400"/>
-            <a:ext cx="136624" cy="190500"/>
-          </a:xfrm>
-          <a:prstGeom prst="rect">
-            <a:avLst/>
-          </a:prstGeom>
-          <a:noFill/>
-          <a:ln/>
-        </p:spPr>
-        <p:txBody>
-          <a:bodyPr wrap="square" lIns="25400" tIns="25400" rIns="25400" bIns="25400" rtlCol="0" anchor="t">
-            <a:normAutofit fontScale="47500" lnSpcReduction="20000"/>
-          </a:bodyPr>
-          <a:lstStyle/>
-          <a:p>
-            <a:pPr marL="0" indent="0" algn="l">
-              <a:lnSpc>
-                <a:spcPct val="131154"/>
-              </a:lnSpc>
-              <a:buNone/>
-            </a:pPr>
-            <a:r>
-              <a:rPr lang="en-US" sz="1650" dirty="0">
-                <a:solidFill>
-                  <a:srgbClr val="E9E9ED">
-                    <a:alpha val="55000"/>
-                  </a:srgbClr>
-                </a:solidFill>
-                <a:latin typeface="Arial" pitchFamily="34" charset="0"/>
-                <a:ea typeface="Arial" pitchFamily="34" charset="-122"/>
-                <a:cs typeface="Arial" pitchFamily="34" charset="-120"/>
-              </a:rPr>
-              <a:t>·</a:t>
-            </a:r>
-            <a:endParaRPr lang="en-US" sz="1650" dirty="0"/>
-          </a:p>
-        </p:txBody>
-      </p:sp>
-      <p:sp>
-        <p:nvSpPr>
-          <p:cNvPr id="8" name="Text 6"/>
-          <p:cNvSpPr/>
-          <p:nvPr/>
-        </p:nvSpPr>
-        <p:spPr>
-          <a:xfrm>
-            <a:off x="4496395" y="9296400"/>
-            <a:ext cx="2313072" cy="190500"/>
-          </a:xfrm>
-          <a:prstGeom prst="rect">
-            <a:avLst/>
-          </a:prstGeom>
-          <a:noFill/>
-          <a:ln/>
-        </p:spPr>
-        <p:txBody>
-          <a:bodyPr wrap="square" lIns="25400" tIns="25400" rIns="25400" bIns="25400" rtlCol="0" anchor="t">
-            <a:normAutofit fontScale="47500" lnSpcReduction="20000"/>
-          </a:bodyPr>
-          <a:lstStyle/>
-          <a:p>
-            <a:pPr marL="0" indent="0" algn="l">
-              <a:lnSpc>
-                <a:spcPct val="131154"/>
-              </a:lnSpc>
-              <a:buNone/>
-            </a:pPr>
-            <a:r>
-              <a:rPr lang="en-US" sz="1650" dirty="0">
-                <a:solidFill>
-                  <a:srgbClr val="E9E9ED">
-                    <a:alpha val="55000"/>
-                  </a:srgbClr>
-                </a:solidFill>
-                <a:latin typeface="Arial" pitchFamily="34" charset="0"/>
-                <a:ea typeface="Arial" pitchFamily="34" charset="-122"/>
-                <a:cs typeface="Arial" pitchFamily="34" charset="-120"/>
-              </a:rPr>
-              <a:t>Data Days — DP-800</a:t>
-            </a:r>
-            <a:endParaRPr lang="en-US" sz="1650" dirty="0"/>
-          </a:p>
-        </p:txBody>
-      </p:sp>
+        </p:grpSpPr>
+        <p:pic>
+          <p:nvPicPr>
+            <p:cNvPr id="8" name="Image 7">
+              <a:extLst>
+                <a:ext uri="{FF2B5EF4-FFF2-40B4-BE49-F238E27FC236}">
+                  <a16:creationId xmlns:a16="http://schemas.microsoft.com/office/drawing/2014/main" id="{AB0202BA-3D2E-364E-FC64-8FFFC7D2763C}"/>
+                </a:ext>
+              </a:extLst>
+            </p:cNvPr>
+            <p:cNvPicPr>
+              <a:picLocks noChangeAspect="1"/>
+            </p:cNvPicPr>
+            <p:nvPr/>
+          </p:nvPicPr>
+          <p:blipFill>
+            <a:blip r:embed="rId3"/>
+            <a:stretch>
+              <a:fillRect/>
+            </a:stretch>
+          </p:blipFill>
+          <p:spPr>
+            <a:xfrm>
+              <a:off x="11002220" y="4636074"/>
+              <a:ext cx="6990490" cy="4660326"/>
+            </a:xfrm>
+            <a:prstGeom prst="rect">
+              <a:avLst/>
+            </a:prstGeom>
+          </p:spPr>
+        </p:pic>
+        <p:pic>
+          <p:nvPicPr>
+            <p:cNvPr id="9" name="Image 8">
+              <a:extLst>
+                <a:ext uri="{FF2B5EF4-FFF2-40B4-BE49-F238E27FC236}">
+                  <a16:creationId xmlns:a16="http://schemas.microsoft.com/office/drawing/2014/main" id="{DD9687BA-EC00-7E8A-8C40-49C0292B7CB5}"/>
+                </a:ext>
+              </a:extLst>
+            </p:cNvPr>
+            <p:cNvPicPr>
+              <a:picLocks noChangeAspect="1"/>
+            </p:cNvPicPr>
+            <p:nvPr/>
+          </p:nvPicPr>
+          <p:blipFill>
+            <a:blip r:embed="rId4"/>
+            <a:stretch>
+              <a:fillRect/>
+            </a:stretch>
+          </p:blipFill>
+          <p:spPr>
+            <a:xfrm>
+              <a:off x="14823713" y="565257"/>
+              <a:ext cx="2808967" cy="2808967"/>
+            </a:xfrm>
+            <a:prstGeom prst="ellipse">
+              <a:avLst/>
+            </a:prstGeom>
+            <a:ln w="3175" cap="rnd">
+              <a:solidFill>
+                <a:srgbClr val="C8C6BD"/>
+              </a:solidFill>
+              <a:prstDash val="solid"/>
+            </a:ln>
+            <a:effectLst>
+              <a:outerShdw blurRad="127000" algn="bl" rotWithShape="0">
+                <a:srgbClr val="000000"/>
+              </a:outerShdw>
+            </a:effectLst>
+            <a:scene3d>
+              <a:camera prst="perspectiveFront" fov="5400000"/>
+              <a:lightRig rig="threePt" dir="t">
+                <a:rot lat="0" lon="0" rev="19200000"/>
+              </a:lightRig>
+            </a:scene3d>
+            <a:sp3d extrusionH="25400">
+              <a:bevelT w="304800" h="152400" prst="hardEdge"/>
+              <a:extrusionClr>
+                <a:srgbClr val="000000"/>
+              </a:extrusionClr>
+            </a:sp3d>
+          </p:spPr>
+        </p:pic>
+        <p:pic>
+          <p:nvPicPr>
+            <p:cNvPr id="10" name="Image 9">
+              <a:extLst>
+                <a:ext uri="{FF2B5EF4-FFF2-40B4-BE49-F238E27FC236}">
+                  <a16:creationId xmlns:a16="http://schemas.microsoft.com/office/drawing/2014/main" id="{EC1C49B8-53E7-382C-64B2-E2965D12A33D}"/>
+                </a:ext>
+              </a:extLst>
+            </p:cNvPr>
+            <p:cNvPicPr>
+              <a:picLocks noChangeAspect="1"/>
+            </p:cNvPicPr>
+            <p:nvPr/>
+          </p:nvPicPr>
+          <p:blipFill>
+            <a:blip r:embed="rId5"/>
+            <a:stretch>
+              <a:fillRect/>
+            </a:stretch>
+          </p:blipFill>
+          <p:spPr>
+            <a:xfrm>
+              <a:off x="11636328" y="561196"/>
+              <a:ext cx="2807208" cy="2807208"/>
+            </a:xfrm>
+            <a:prstGeom prst="ellipse">
+              <a:avLst/>
+            </a:prstGeom>
+            <a:ln w="3175" cap="rnd">
+              <a:solidFill>
+                <a:srgbClr val="C8C6BD"/>
+              </a:solidFill>
+              <a:prstDash val="solid"/>
+            </a:ln>
+            <a:effectLst>
+              <a:outerShdw blurRad="127000" algn="bl" rotWithShape="0">
+                <a:srgbClr val="000000"/>
+              </a:outerShdw>
+            </a:effectLst>
+            <a:scene3d>
+              <a:camera prst="perspectiveFront" fov="5400000"/>
+              <a:lightRig rig="threePt" dir="t">
+                <a:rot lat="0" lon="0" rev="19200000"/>
+              </a:lightRig>
+            </a:scene3d>
+            <a:sp3d extrusionH="25400">
+              <a:bevelT w="304800" h="152400" prst="hardEdge"/>
+              <a:extrusionClr>
+                <a:srgbClr val="000000"/>
+              </a:extrusionClr>
+            </a:sp3d>
+          </p:spPr>
+        </p:pic>
+        <p:sp>
+          <p:nvSpPr>
+            <p:cNvPr id="11" name="ZoneTexte 10">
+              <a:extLst>
+                <a:ext uri="{FF2B5EF4-FFF2-40B4-BE49-F238E27FC236}">
+                  <a16:creationId xmlns:a16="http://schemas.microsoft.com/office/drawing/2014/main" id="{0F5690E9-226E-5906-AE8D-3D4F6435CE90}"/>
+                </a:ext>
+              </a:extLst>
+            </p:cNvPr>
+            <p:cNvSpPr txBox="1"/>
+            <p:nvPr/>
+          </p:nvSpPr>
+          <p:spPr>
+            <a:xfrm>
+              <a:off x="14889480" y="3668223"/>
+              <a:ext cx="2743200" cy="461665"/>
+            </a:xfrm>
+            <a:prstGeom prst="rect">
+              <a:avLst/>
+            </a:prstGeom>
+            <a:noFill/>
+          </p:spPr>
+          <p:txBody>
+            <a:bodyPr wrap="square">
+              <a:spAutoFit/>
+            </a:bodyPr>
+            <a:lstStyle/>
+            <a:p>
+              <a:pPr lvl="0"/>
+              <a:r>
+                <a:rPr lang="en-US" sz="2400" i="0" kern="1200" dirty="0">
+                  <a:effectLst/>
+                  <a:latin typeface="+mn-lt"/>
+                  <a:ea typeface="+mn-ea"/>
+                  <a:cs typeface="+mn-cs"/>
+                </a:rPr>
+                <a:t>Abdelhak BENYAHIA</a:t>
+              </a:r>
+            </a:p>
+          </p:txBody>
+        </p:sp>
+        <p:sp>
+          <p:nvSpPr>
+            <p:cNvPr id="12" name="ZoneTexte 11">
+              <a:extLst>
+                <a:ext uri="{FF2B5EF4-FFF2-40B4-BE49-F238E27FC236}">
+                  <a16:creationId xmlns:a16="http://schemas.microsoft.com/office/drawing/2014/main" id="{1F963250-E390-8203-F60C-AA8D21E2D5BD}"/>
+                </a:ext>
+              </a:extLst>
+            </p:cNvPr>
+            <p:cNvSpPr txBox="1"/>
+            <p:nvPr/>
+          </p:nvSpPr>
+          <p:spPr>
+            <a:xfrm>
+              <a:off x="11668332" y="3668223"/>
+              <a:ext cx="2743200" cy="461665"/>
+            </a:xfrm>
+            <a:prstGeom prst="rect">
+              <a:avLst/>
+            </a:prstGeom>
+            <a:noFill/>
+          </p:spPr>
+          <p:txBody>
+            <a:bodyPr wrap="square">
+              <a:spAutoFit/>
+            </a:bodyPr>
+            <a:lstStyle/>
+            <a:p>
+              <a:pPr lvl="0"/>
+              <a:r>
+                <a:rPr lang="en-US" sz="2400" dirty="0"/>
+                <a:t>Rodrigue YENGO</a:t>
+              </a:r>
+            </a:p>
+          </p:txBody>
+        </p:sp>
+      </p:grpSp>
     </p:spTree>
   </p:cSld>
   <p:clrMapOvr>
@@ -1993,47 +2568,6 @@
       </p:grpSpPr>
       <p:sp>
         <p:nvSpPr>
-          <p:cNvPr id="2" name="Shape 0"/>
-          <p:cNvSpPr/>
-          <p:nvPr/>
-        </p:nvSpPr>
-        <p:spPr>
-          <a:xfrm>
-            <a:off x="0" y="0"/>
-            <a:ext cx="18288000" cy="10287000"/>
-          </a:xfrm>
-          <a:prstGeom prst="rect">
-            <a:avLst/>
-          </a:prstGeom>
-          <a:gradFill rotWithShape="1">
-            <a:gsLst>
-              <a:gs pos="0">
-                <a:srgbClr val="2B2741">
-                  <a:alpha val="75000"/>
-                </a:srgbClr>
-              </a:gs>
-              <a:gs pos="58000">
-                <a:srgbClr val="2B2741">
-                  <a:alpha val="0"/>
-                </a:srgbClr>
-              </a:gs>
-            </a:gsLst>
-            <a:path path="circle">
-              <a:fillToRect l="80000" r="20000" b="100000"/>
-            </a:path>
-          </a:gradFill>
-          <a:ln/>
-        </p:spPr>
-        <p:txBody>
-          <a:bodyPr/>
-          <a:lstStyle/>
-          <a:p>
-            <a:endParaRPr lang="en-GB"/>
-          </a:p>
-        </p:txBody>
-      </p:sp>
-      <p:sp>
-        <p:nvSpPr>
           <p:cNvPr id="4" name="Text 2"/>
           <p:cNvSpPr/>
           <p:nvPr/>
@@ -2428,30 +2962,6 @@
           </a:p>
         </p:txBody>
       </p:sp>
-      <p:pic>
-        <p:nvPicPr>
-          <p:cNvPr id="13" name="Image 0" descr="preencoded.png"/>
-          <p:cNvPicPr>
-            <a:picLocks noChangeAspect="1"/>
-          </p:cNvPicPr>
-          <p:nvPr/>
-        </p:nvPicPr>
-        <p:blipFill>
-          <a:blip r:embed="rId3"/>
-          <a:stretch>
-            <a:fillRect/>
-          </a:stretch>
-        </p:blipFill>
-        <p:spPr>
-          <a:xfrm>
-            <a:off x="11167765" y="9867900"/>
-            <a:ext cx="5977235" cy="152400"/>
-          </a:xfrm>
-          <a:prstGeom prst="rect">
-            <a:avLst/>
-          </a:prstGeom>
-        </p:spPr>
-      </p:pic>
     </p:spTree>
   </p:cSld>
   <p:clrMapOvr>
@@ -2487,47 +2997,6 @@
       </p:grpSpPr>
       <p:sp>
         <p:nvSpPr>
-          <p:cNvPr id="2" name="Shape 0"/>
-          <p:cNvSpPr/>
-          <p:nvPr/>
-        </p:nvSpPr>
-        <p:spPr>
-          <a:xfrm>
-            <a:off x="0" y="0"/>
-            <a:ext cx="18288000" cy="10287000"/>
-          </a:xfrm>
-          <a:prstGeom prst="rect">
-            <a:avLst/>
-          </a:prstGeom>
-          <a:gradFill rotWithShape="1">
-            <a:gsLst>
-              <a:gs pos="0">
-                <a:srgbClr val="2B2741">
-                  <a:alpha val="75000"/>
-                </a:srgbClr>
-              </a:gs>
-              <a:gs pos="58000">
-                <a:srgbClr val="2B2741">
-                  <a:alpha val="0"/>
-                </a:srgbClr>
-              </a:gs>
-            </a:gsLst>
-            <a:path path="circle">
-              <a:fillToRect l="80000" r="20000" b="100000"/>
-            </a:path>
-          </a:gradFill>
-          <a:ln/>
-        </p:spPr>
-        <p:txBody>
-          <a:bodyPr/>
-          <a:lstStyle/>
-          <a:p>
-            <a:endParaRPr lang="en-GB"/>
-          </a:p>
-        </p:txBody>
-      </p:sp>
-      <p:sp>
-        <p:nvSpPr>
           <p:cNvPr id="4" name="Text 2"/>
           <p:cNvSpPr/>
           <p:nvPr/>
@@ -2834,30 +3303,6 @@
           </a:p>
         </p:txBody>
       </p:sp>
-      <p:pic>
-        <p:nvPicPr>
-          <p:cNvPr id="11" name="Image 0" descr="preencoded.png"/>
-          <p:cNvPicPr>
-            <a:picLocks noChangeAspect="1"/>
-          </p:cNvPicPr>
-          <p:nvPr/>
-        </p:nvPicPr>
-        <p:blipFill>
-          <a:blip r:embed="rId3"/>
-          <a:stretch>
-            <a:fillRect/>
-          </a:stretch>
-        </p:blipFill>
-        <p:spPr>
-          <a:xfrm>
-            <a:off x="11167765" y="9867900"/>
-            <a:ext cx="5977235" cy="152400"/>
-          </a:xfrm>
-          <a:prstGeom prst="rect">
-            <a:avLst/>
-          </a:prstGeom>
-        </p:spPr>
-      </p:pic>
     </p:spTree>
   </p:cSld>
   <p:clrMapOvr>
@@ -2893,47 +3338,6 @@
       </p:grpSpPr>
       <p:sp>
         <p:nvSpPr>
-          <p:cNvPr id="2" name="Shape 0"/>
-          <p:cNvSpPr/>
-          <p:nvPr/>
-        </p:nvSpPr>
-        <p:spPr>
-          <a:xfrm>
-            <a:off x="0" y="0"/>
-            <a:ext cx="18288000" cy="10287000"/>
-          </a:xfrm>
-          <a:prstGeom prst="rect">
-            <a:avLst/>
-          </a:prstGeom>
-          <a:gradFill rotWithShape="1">
-            <a:gsLst>
-              <a:gs pos="0">
-                <a:srgbClr val="2B2741">
-                  <a:alpha val="75000"/>
-                </a:srgbClr>
-              </a:gs>
-              <a:gs pos="58000">
-                <a:srgbClr val="2B2741">
-                  <a:alpha val="0"/>
-                </a:srgbClr>
-              </a:gs>
-            </a:gsLst>
-            <a:path path="circle">
-              <a:fillToRect l="80000" r="20000" b="100000"/>
-            </a:path>
-          </a:gradFill>
-          <a:ln/>
-        </p:spPr>
-        <p:txBody>
-          <a:bodyPr/>
-          <a:lstStyle/>
-          <a:p>
-            <a:endParaRPr lang="en-GB" dirty="0"/>
-          </a:p>
-        </p:txBody>
-      </p:sp>
-      <p:sp>
-        <p:nvSpPr>
           <p:cNvPr id="4" name="Text 2"/>
           <p:cNvSpPr/>
           <p:nvPr/>
@@ -3309,30 +3713,6 @@
           </a:p>
         </p:txBody>
       </p:sp>
-      <p:pic>
-        <p:nvPicPr>
-          <p:cNvPr id="7" name="Image 0" descr="preencoded.png"/>
-          <p:cNvPicPr>
-            <a:picLocks noChangeAspect="1"/>
-          </p:cNvPicPr>
-          <p:nvPr/>
-        </p:nvPicPr>
-        <p:blipFill>
-          <a:blip r:embed="rId3"/>
-          <a:stretch>
-            <a:fillRect/>
-          </a:stretch>
-        </p:blipFill>
-        <p:spPr>
-          <a:xfrm>
-            <a:off x="11167765" y="9867900"/>
-            <a:ext cx="5977235" cy="152400"/>
-          </a:xfrm>
-          <a:prstGeom prst="rect">
-            <a:avLst/>
-          </a:prstGeom>
-        </p:spPr>
-      </p:pic>
     </p:spTree>
   </p:cSld>
   <p:clrMapOvr>
@@ -3368,47 +3748,6 @@
       </p:grpSpPr>
       <p:sp>
         <p:nvSpPr>
-          <p:cNvPr id="2" name="Shape 0"/>
-          <p:cNvSpPr/>
-          <p:nvPr/>
-        </p:nvSpPr>
-        <p:spPr>
-          <a:xfrm>
-            <a:off x="0" y="0"/>
-            <a:ext cx="18288000" cy="10287000"/>
-          </a:xfrm>
-          <a:prstGeom prst="rect">
-            <a:avLst/>
-          </a:prstGeom>
-          <a:gradFill rotWithShape="1">
-            <a:gsLst>
-              <a:gs pos="0">
-                <a:srgbClr val="2B2741">
-                  <a:alpha val="75000"/>
-                </a:srgbClr>
-              </a:gs>
-              <a:gs pos="58000">
-                <a:srgbClr val="2B2741">
-                  <a:alpha val="0"/>
-                </a:srgbClr>
-              </a:gs>
-            </a:gsLst>
-            <a:path path="circle">
-              <a:fillToRect l="80000" r="20000" b="100000"/>
-            </a:path>
-          </a:gradFill>
-          <a:ln/>
-        </p:spPr>
-        <p:txBody>
-          <a:bodyPr/>
-          <a:lstStyle/>
-          <a:p>
-            <a:endParaRPr lang="en-GB"/>
-          </a:p>
-        </p:txBody>
-      </p:sp>
-      <p:sp>
-        <p:nvSpPr>
           <p:cNvPr id="4" name="Text 2"/>
           <p:cNvSpPr/>
           <p:nvPr/>
@@ -3658,47 +3997,6 @@
       </p:grpSpPr>
       <p:sp>
         <p:nvSpPr>
-          <p:cNvPr id="2" name="Shape 0"/>
-          <p:cNvSpPr/>
-          <p:nvPr/>
-        </p:nvSpPr>
-        <p:spPr>
-          <a:xfrm>
-            <a:off x="0" y="0"/>
-            <a:ext cx="18288000" cy="10287000"/>
-          </a:xfrm>
-          <a:prstGeom prst="rect">
-            <a:avLst/>
-          </a:prstGeom>
-          <a:gradFill rotWithShape="1">
-            <a:gsLst>
-              <a:gs pos="0">
-                <a:srgbClr val="2B2741">
-                  <a:alpha val="75000"/>
-                </a:srgbClr>
-              </a:gs>
-              <a:gs pos="58000">
-                <a:srgbClr val="2B2741">
-                  <a:alpha val="0"/>
-                </a:srgbClr>
-              </a:gs>
-            </a:gsLst>
-            <a:path path="circle">
-              <a:fillToRect l="80000" r="20000" b="100000"/>
-            </a:path>
-          </a:gradFill>
-          <a:ln/>
-        </p:spPr>
-        <p:txBody>
-          <a:bodyPr/>
-          <a:lstStyle/>
-          <a:p>
-            <a:endParaRPr lang="en-GB"/>
-          </a:p>
-        </p:txBody>
-      </p:sp>
-      <p:sp>
-        <p:nvSpPr>
           <p:cNvPr id="4" name="Text 2"/>
           <p:cNvSpPr/>
           <p:nvPr/>
@@ -4090,30 +4388,6 @@
           </a:p>
         </p:txBody>
       </p:sp>
-      <p:pic>
-        <p:nvPicPr>
-          <p:cNvPr id="14" name="Image 0" descr="preencoded.png"/>
-          <p:cNvPicPr>
-            <a:picLocks noChangeAspect="1"/>
-          </p:cNvPicPr>
-          <p:nvPr/>
-        </p:nvPicPr>
-        <p:blipFill>
-          <a:blip r:embed="rId3"/>
-          <a:stretch>
-            <a:fillRect/>
-          </a:stretch>
-        </p:blipFill>
-        <p:spPr>
-          <a:xfrm>
-            <a:off x="11167765" y="9867900"/>
-            <a:ext cx="5977235" cy="152400"/>
-          </a:xfrm>
-          <a:prstGeom prst="rect">
-            <a:avLst/>
-          </a:prstGeom>
-        </p:spPr>
-      </p:pic>
     </p:spTree>
   </p:cSld>
   <p:clrMapOvr>
@@ -4149,47 +4423,6 @@
       </p:grpSpPr>
       <p:sp>
         <p:nvSpPr>
-          <p:cNvPr id="2" name="Shape 0"/>
-          <p:cNvSpPr/>
-          <p:nvPr/>
-        </p:nvSpPr>
-        <p:spPr>
-          <a:xfrm>
-            <a:off x="0" y="0"/>
-            <a:ext cx="18288000" cy="10287000"/>
-          </a:xfrm>
-          <a:prstGeom prst="rect">
-            <a:avLst/>
-          </a:prstGeom>
-          <a:gradFill rotWithShape="1">
-            <a:gsLst>
-              <a:gs pos="0">
-                <a:srgbClr val="2B2741">
-                  <a:alpha val="75000"/>
-                </a:srgbClr>
-              </a:gs>
-              <a:gs pos="58000">
-                <a:srgbClr val="2B2741">
-                  <a:alpha val="0"/>
-                </a:srgbClr>
-              </a:gs>
-            </a:gsLst>
-            <a:path path="circle">
-              <a:fillToRect l="80000" r="20000" b="100000"/>
-            </a:path>
-          </a:gradFill>
-          <a:ln/>
-        </p:spPr>
-        <p:txBody>
-          <a:bodyPr/>
-          <a:lstStyle/>
-          <a:p>
-            <a:endParaRPr lang="en-GB"/>
-          </a:p>
-        </p:txBody>
-      </p:sp>
-      <p:sp>
-        <p:nvSpPr>
           <p:cNvPr id="4" name="Text 2"/>
           <p:cNvSpPr/>
           <p:nvPr/>
@@ -4336,30 +4569,6 @@
           </a:p>
         </p:txBody>
       </p:sp>
-      <p:pic>
-        <p:nvPicPr>
-          <p:cNvPr id="6" name="Image 0" descr="preencoded.png"/>
-          <p:cNvPicPr>
-            <a:picLocks noChangeAspect="1"/>
-          </p:cNvPicPr>
-          <p:nvPr/>
-        </p:nvPicPr>
-        <p:blipFill>
-          <a:blip r:embed="rId3"/>
-          <a:stretch>
-            <a:fillRect/>
-          </a:stretch>
-        </p:blipFill>
-        <p:spPr>
-          <a:xfrm>
-            <a:off x="11167765" y="9867900"/>
-            <a:ext cx="5977235" cy="152400"/>
-          </a:xfrm>
-          <a:prstGeom prst="rect">
-            <a:avLst/>
-          </a:prstGeom>
-        </p:spPr>
-      </p:pic>
     </p:spTree>
   </p:cSld>
   <p:clrMapOvr>
@@ -4393,47 +4602,6 @@
           <a:chExt cx="0" cy="0"/>
         </a:xfrm>
       </p:grpSpPr>
-      <p:sp>
-        <p:nvSpPr>
-          <p:cNvPr id="2" name="Shape 0"/>
-          <p:cNvSpPr/>
-          <p:nvPr/>
-        </p:nvSpPr>
-        <p:spPr>
-          <a:xfrm>
-            <a:off x="0" y="0"/>
-            <a:ext cx="18288000" cy="10287000"/>
-          </a:xfrm>
-          <a:prstGeom prst="rect">
-            <a:avLst/>
-          </a:prstGeom>
-          <a:gradFill rotWithShape="1">
-            <a:gsLst>
-              <a:gs pos="0">
-                <a:srgbClr val="353A80">
-                  <a:alpha val="70000"/>
-                </a:srgbClr>
-              </a:gs>
-              <a:gs pos="64000">
-                <a:srgbClr val="353A80">
-                  <a:alpha val="0"/>
-                </a:srgbClr>
-              </a:gs>
-            </a:gsLst>
-            <a:path path="circle">
-              <a:fillToRect l="22000" t="42000" r="78000" b="58000"/>
-            </a:path>
-          </a:gradFill>
-          <a:ln/>
-        </p:spPr>
-        <p:txBody>
-          <a:bodyPr/>
-          <a:lstStyle/>
-          <a:p>
-            <a:endParaRPr lang="en-GB"/>
-          </a:p>
-        </p:txBody>
-      </p:sp>
       <p:sp>
         <p:nvSpPr>
           <p:cNvPr id="3" name="Text 1"/>
@@ -5185,6 +5353,15 @@
 </file>
 
 <file path=customXml/item1.xml><?xml version="1.0" encoding="utf-8"?>
+<?mso-contentType ?>
+<FormTemplates xmlns="http://schemas.microsoft.com/sharepoint/v3/contenttype/forms">
+  <Display>DocumentLibraryForm</Display>
+  <Edit>DocumentLibraryForm</Edit>
+  <New>DocumentLibraryForm</New>
+</FormTemplates>
+</file>
+
+<file path=customXml/item2.xml><?xml version="1.0" encoding="utf-8"?>
 <p:properties xmlns:p="http://schemas.microsoft.com/office/2006/metadata/properties" xmlns:xsi="http://www.w3.org/2001/XMLSchema-instance" xmlns:pc="http://schemas.microsoft.com/office/infopath/2007/PartnerControls">
   <documentManagement>
     <TaxCatchAll xmlns="33363a87-7e43-46da-9332-4c6d176b06e4" xsi:nil="true"/>
@@ -5195,18 +5372,9 @@
 </p:properties>
 </file>
 
-<file path=customXml/item2.xml><?xml version="1.0" encoding="utf-8"?>
-<?mso-contentType ?>
-<FormTemplates xmlns="http://schemas.microsoft.com/sharepoint/v3/contenttype/forms">
-  <Display>DocumentLibraryForm</Display>
-  <Edit>DocumentLibraryForm</Edit>
-  <New>DocumentLibraryForm</New>
-</FormTemplates>
-</file>
-
 <file path=customXml/item3.xml><?xml version="1.0" encoding="utf-8"?>
-<ct:contentTypeSchema xmlns:ct="http://schemas.microsoft.com/office/2006/metadata/contentType" xmlns:ma="http://schemas.microsoft.com/office/2006/metadata/properties/metaAttributes" ct:_="" ma:_="" ma:contentTypeName="Document" ma:contentTypeID="0x0101000085964E25350F4FB3FE643AE11B2B20" ma:contentTypeVersion="10" ma:contentTypeDescription="Crée un document." ma:contentTypeScope="" ma:versionID="ce288966c27ce7b3e7a9f8d1d4c0f960">
-  <xsd:schema xmlns:xsd="http://www.w3.org/2001/XMLSchema" xmlns:xs="http://www.w3.org/2001/XMLSchema" xmlns:p="http://schemas.microsoft.com/office/2006/metadata/properties" xmlns:ns2="d9df9240-fc95-4deb-9c9d-de700c44a7a7" xmlns:ns3="33363a87-7e43-46da-9332-4c6d176b06e4" targetNamespace="http://schemas.microsoft.com/office/2006/metadata/properties" ma:root="true" ma:fieldsID="ee543c07c1445a444ae8fee589f454ee" ns2:_="" ns3:_="">
+<ct:contentTypeSchema xmlns:ct="http://schemas.microsoft.com/office/2006/metadata/contentType" xmlns:ma="http://schemas.microsoft.com/office/2006/metadata/properties/metaAttributes" ct:_="" ma:_="" ma:contentTypeName="Document" ma:contentTypeID="0x0101000085964E25350F4FB3FE643AE11B2B20" ma:contentTypeVersion="10" ma:contentTypeDescription="Create a new document." ma:contentTypeScope="" ma:versionID="1e1d1b9c64e4e863bf8aa3867e361155">
+  <xsd:schema xmlns:xsd="http://www.w3.org/2001/XMLSchema" xmlns:xs="http://www.w3.org/2001/XMLSchema" xmlns:p="http://schemas.microsoft.com/office/2006/metadata/properties" xmlns:ns2="d9df9240-fc95-4deb-9c9d-de700c44a7a7" xmlns:ns3="33363a87-7e43-46da-9332-4c6d176b06e4" targetNamespace="http://schemas.microsoft.com/office/2006/metadata/properties" ma:root="true" ma:fieldsID="6f44e94be1ec4ee84c894018ce3c7098" ns2:_="" ns3:_="">
     <xsd:import namespace="d9df9240-fc95-4deb-9c9d-de700c44a7a7"/>
     <xsd:import namespace="33363a87-7e43-46da-9332-4c6d176b06e4"/>
     <xsd:element name="properties">
@@ -5254,7 +5422,7 @@
         <xsd:restriction base="dms:Text"/>
       </xsd:simpleType>
     </xsd:element>
-    <xsd:element name="lcf76f155ced4ddcb4097134ff3c332f" ma:index="13" nillable="true" ma:taxonomy="true" ma:internalName="lcf76f155ced4ddcb4097134ff3c332f" ma:taxonomyFieldName="MediaServiceImageTags" ma:displayName="Balises d’images" ma:readOnly="false" ma:fieldId="{5cf76f15-5ced-4ddc-b409-7134ff3c332f}" ma:taxonomyMulti="true" ma:sspId="4ef1542d-73bf-4483-a10a-dd7f0542ff0d" ma:termSetId="09814cd3-568e-fe90-9814-8d621ff8fb84" ma:anchorId="fba54fb3-c3e1-fe81-a776-ca4b69148c4d" ma:open="true" ma:isKeyword="false">
+    <xsd:element name="lcf76f155ced4ddcb4097134ff3c332f" ma:index="13" nillable="true" ma:taxonomy="true" ma:internalName="lcf76f155ced4ddcb4097134ff3c332f" ma:taxonomyFieldName="MediaServiceImageTags" ma:displayName="Image Tags" ma:readOnly="false" ma:fieldId="{5cf76f15-5ced-4ddc-b409-7134ff3c332f}" ma:taxonomyMulti="true" ma:sspId="4ef1542d-73bf-4483-a10a-dd7f0542ff0d" ma:termSetId="09814cd3-568e-fe90-9814-8d621ff8fb84" ma:anchorId="fba54fb3-c3e1-fe81-a776-ca4b69148c4d" ma:open="true" ma:isKeyword="false">
       <xsd:complexType>
         <xsd:sequence>
           <xsd:element ref="pc:Terms" minOccurs="0" maxOccurs="1"/>
@@ -5303,8 +5471,8 @@
         <xsd:element ref="dc:creator" minOccurs="0" maxOccurs="1"/>
         <xsd:element ref="dcterms:created" minOccurs="0" maxOccurs="1"/>
         <xsd:element ref="dc:identifier" minOccurs="0" maxOccurs="1"/>
-        <xsd:element name="contentType" minOccurs="0" maxOccurs="1" type="xsd:string" ma:index="0" ma:displayName="Type de contenu"/>
-        <xsd:element ref="dc:title" minOccurs="0" maxOccurs="1" ma:index="4" ma:displayName="Titre"/>
+        <xsd:element name="contentType" minOccurs="0" maxOccurs="1" type="xsd:string" ma:index="0" ma:displayName="Content Type"/>
+        <xsd:element ref="dc:title" minOccurs="0" maxOccurs="1" ma:index="4" ma:displayName="Title"/>
         <xsd:element ref="dc:subject" minOccurs="0" maxOccurs="1"/>
         <xsd:element ref="dc:description" minOccurs="0" maxOccurs="1"/>
         <xsd:element name="keywords" minOccurs="0" maxOccurs="1" type="xsd:string"/>
@@ -5394,23 +5562,6 @@
 </file>
 
 <file path=customXml/itemProps1.xml><?xml version="1.0" encoding="utf-8"?>
-<ds:datastoreItem xmlns:ds="http://schemas.openxmlformats.org/officeDocument/2006/customXml" ds:itemID="{C4C455AA-6F1D-4B9F-91AA-3ABFE593D60A}">
-  <ds:schemaRefs>
-    <ds:schemaRef ds:uri="http://www.w3.org/XML/1998/namespace"/>
-    <ds:schemaRef ds:uri="33363a87-7e43-46da-9332-4c6d176b06e4"/>
-    <ds:schemaRef ds:uri="http://schemas.openxmlformats.org/package/2006/metadata/core-properties"/>
-    <ds:schemaRef ds:uri="http://schemas.microsoft.com/office/2006/documentManagement/types"/>
-    <ds:schemaRef ds:uri="http://purl.org/dc/elements/1.1/"/>
-    <ds:schemaRef ds:uri="http://purl.org/dc/terms/"/>
-    <ds:schemaRef ds:uri="http://purl.org/dc/dcmitype/"/>
-    <ds:schemaRef ds:uri="http://schemas.microsoft.com/office/infopath/2007/PartnerControls"/>
-    <ds:schemaRef ds:uri="d9df9240-fc95-4deb-9c9d-de700c44a7a7"/>
-    <ds:schemaRef ds:uri="http://schemas.microsoft.com/office/2006/metadata/properties"/>
-  </ds:schemaRefs>
-</ds:datastoreItem>
-</file>
-
-<file path=customXml/itemProps2.xml><?xml version="1.0" encoding="utf-8"?>
 <ds:datastoreItem xmlns:ds="http://schemas.openxmlformats.org/officeDocument/2006/customXml" ds:itemID="{E8B697FD-CAE8-4F85-9F59-E806B7E0D9EB}">
   <ds:schemaRefs>
     <ds:schemaRef ds:uri="http://schemas.microsoft.com/sharepoint/v3/contenttype/forms"/>
@@ -5418,8 +5569,25 @@
 </ds:datastoreItem>
 </file>
 
+<file path=customXml/itemProps2.xml><?xml version="1.0" encoding="utf-8"?>
+<ds:datastoreItem xmlns:ds="http://schemas.openxmlformats.org/officeDocument/2006/customXml" ds:itemID="{C4C455AA-6F1D-4B9F-91AA-3ABFE593D60A}">
+  <ds:schemaRefs>
+    <ds:schemaRef ds:uri="http://schemas.microsoft.com/office/2006/metadata/properties"/>
+    <ds:schemaRef ds:uri="http://purl.org/dc/terms/"/>
+    <ds:schemaRef ds:uri="http://purl.org/dc/dcmitype/"/>
+    <ds:schemaRef ds:uri="33363a87-7e43-46da-9332-4c6d176b06e4"/>
+    <ds:schemaRef ds:uri="http://schemas.openxmlformats.org/package/2006/metadata/core-properties"/>
+    <ds:schemaRef ds:uri="http://purl.org/dc/elements/1.1/"/>
+    <ds:schemaRef ds:uri="http://schemas.microsoft.com/office/2006/documentManagement/types"/>
+    <ds:schemaRef ds:uri="http://schemas.microsoft.com/office/infopath/2007/PartnerControls"/>
+    <ds:schemaRef ds:uri="d9df9240-fc95-4deb-9c9d-de700c44a7a7"/>
+    <ds:schemaRef ds:uri="http://www.w3.org/XML/1998/namespace"/>
+  </ds:schemaRefs>
+</ds:datastoreItem>
+</file>
+
 <file path=customXml/itemProps3.xml><?xml version="1.0" encoding="utf-8"?>
-<ds:datastoreItem xmlns:ds="http://schemas.openxmlformats.org/officeDocument/2006/customXml" ds:itemID="{34936CF8-FDAE-4000-9FE3-29CBC8380BA9}"/>
+<ds:datastoreItem xmlns:ds="http://schemas.openxmlformats.org/officeDocument/2006/customXml" ds:itemID="{29C62E42-1847-46C1-B5BB-F32B01A6FEA6}"/>
 </file>
 
 <file path=docMetadata/LabelInfo.xml><?xml version="1.0" encoding="utf-8"?>
